--- a/Banking_AI_Agent_Presentation.pptx
+++ b/Banking_AI_Agent_Presentation.pptx
@@ -3877,7 +3877,7 @@
                   <a:srgbClr val="B0BED0"/>
                 </a:solidFill>
               </a:rPr>
-              <a:t>May 2026  ·  v1.0</a:t>
+              <a:t>May 2026  ·  v1.0  ·  GitHub: https://github.com/mallemala/banking_ai_agent</a:t>
             </a:r>
           </a:p>
         </p:txBody>
@@ -8765,8 +8765,8 @@
         </p:nvSpPr>
         <p:spPr>
           <a:xfrm>
-            <a:off x="3840480" y="3611880"/>
-            <a:ext cx="4572000" cy="548640"/>
+            <a:off x="3200400" y="3611880"/>
+            <a:ext cx="5788152" cy="369332"/>
           </a:xfrm>
           <a:prstGeom prst="rect">
             <a:avLst/>
@@ -8781,12 +8781,12 @@
           <a:p>
             <a:pPr algn="ctr"/>
             <a:r>
-              <a:rPr sz="1800" b="0" i="1">
+              <a:rPr sz="1800" b="0" i="1" dirty="0">
                 <a:solidFill>
                   <a:srgbClr val="B0BED0"/>
                 </a:solidFill>
               </a:rPr>
-              <a:t>Questions &amp; Discussion</a:t>
+              <a:t>GitHub: https://github.com/mallemala/banking_ai_agent</a:t>
             </a:r>
           </a:p>
         </p:txBody>
